--- a/lecture-slides_upload/lecture/01_Statistical Methods_Syllabus and Class Policies.pptx
+++ b/lecture-slides_upload/lecture/01_Statistical Methods_Syllabus and Class Policies.pptx
@@ -5,13 +5,13 @@
     <p:sldMasterId id="2147483648" r:id="rId1"/>
   </p:sldMasterIdLst>
   <p:notesMasterIdLst>
-    <p:notesMasterId r:id="rId20"/>
+    <p:notesMasterId r:id="rId21"/>
   </p:notesMasterIdLst>
   <p:sldIdLst>
     <p:sldId id="257" r:id="rId2"/>
     <p:sldId id="260" r:id="rId3"/>
-    <p:sldId id="258" r:id="rId4"/>
-    <p:sldId id="259" r:id="rId5"/>
+    <p:sldId id="259" r:id="rId4"/>
+    <p:sldId id="275" r:id="rId5"/>
     <p:sldId id="261" r:id="rId6"/>
     <p:sldId id="262" r:id="rId7"/>
     <p:sldId id="263" r:id="rId8"/>
@@ -25,7 +25,8 @@
     <p:sldId id="272" r:id="rId16"/>
     <p:sldId id="271" r:id="rId17"/>
     <p:sldId id="273" r:id="rId18"/>
-    <p:sldId id="274" r:id="rId19"/>
+    <p:sldId id="276" r:id="rId19"/>
+    <p:sldId id="274" r:id="rId20"/>
   </p:sldIdLst>
   <p:sldSz cx="12192000" cy="6858000"/>
   <p:notesSz cx="6858000" cy="9144000"/>
@@ -214,7 +215,7 @@
           <a:p>
             <a:fld id="{6A4B1ABF-BAF2-0E4B-88A8-8F2BBF0074AC}" type="datetimeFigureOut">
               <a:rPr lang="en-US" smtClean="0"/>
-              <a:t>9/6/22</a:t>
+              <a:t>9/2/25</a:t>
             </a:fld>
             <a:endParaRPr lang="en-US"/>
           </a:p>
@@ -964,7 +965,7 @@
           <a:p>
             <a:fld id="{BA763BF8-AC66-E249-9CE8-8353EEB16B82}" type="datetimeFigureOut">
               <a:rPr lang="en-US" smtClean="0"/>
-              <a:t>9/6/22</a:t>
+              <a:t>9/2/25</a:t>
             </a:fld>
             <a:endParaRPr lang="en-US"/>
           </a:p>
@@ -1166,7 +1167,7 @@
           <a:p>
             <a:fld id="{BA763BF8-AC66-E249-9CE8-8353EEB16B82}" type="datetimeFigureOut">
               <a:rPr lang="en-US" smtClean="0"/>
-              <a:t>9/6/22</a:t>
+              <a:t>9/2/25</a:t>
             </a:fld>
             <a:endParaRPr lang="en-US"/>
           </a:p>
@@ -1374,7 +1375,7 @@
           <a:p>
             <a:fld id="{BA763BF8-AC66-E249-9CE8-8353EEB16B82}" type="datetimeFigureOut">
               <a:rPr lang="en-US" smtClean="0"/>
-              <a:t>9/6/22</a:t>
+              <a:t>9/2/25</a:t>
             </a:fld>
             <a:endParaRPr lang="en-US"/>
           </a:p>
@@ -1576,7 +1577,7 @@
           <a:p>
             <a:fld id="{BA763BF8-AC66-E249-9CE8-8353EEB16B82}" type="datetimeFigureOut">
               <a:rPr lang="en-US" smtClean="0"/>
-              <a:t>9/6/22</a:t>
+              <a:t>9/2/25</a:t>
             </a:fld>
             <a:endParaRPr lang="en-US"/>
           </a:p>
@@ -1851,7 +1852,7 @@
           <a:p>
             <a:fld id="{BA763BF8-AC66-E249-9CE8-8353EEB16B82}" type="datetimeFigureOut">
               <a:rPr lang="en-US" smtClean="0"/>
-              <a:t>9/6/22</a:t>
+              <a:t>9/2/25</a:t>
             </a:fld>
             <a:endParaRPr lang="en-US"/>
           </a:p>
@@ -2120,7 +2121,7 @@
           <a:p>
             <a:fld id="{BA763BF8-AC66-E249-9CE8-8353EEB16B82}" type="datetimeFigureOut">
               <a:rPr lang="en-US" smtClean="0"/>
-              <a:t>9/6/22</a:t>
+              <a:t>9/2/25</a:t>
             </a:fld>
             <a:endParaRPr lang="en-US"/>
           </a:p>
@@ -2536,7 +2537,7 @@
           <a:p>
             <a:fld id="{BA763BF8-AC66-E249-9CE8-8353EEB16B82}" type="datetimeFigureOut">
               <a:rPr lang="en-US" smtClean="0"/>
-              <a:t>9/6/22</a:t>
+              <a:t>9/2/25</a:t>
             </a:fld>
             <a:endParaRPr lang="en-US"/>
           </a:p>
@@ -2681,7 +2682,7 @@
           <a:p>
             <a:fld id="{BA763BF8-AC66-E249-9CE8-8353EEB16B82}" type="datetimeFigureOut">
               <a:rPr lang="en-US" smtClean="0"/>
-              <a:t>9/6/22</a:t>
+              <a:t>9/2/25</a:t>
             </a:fld>
             <a:endParaRPr lang="en-US"/>
           </a:p>
@@ -2794,7 +2795,7 @@
           <a:p>
             <a:fld id="{BA763BF8-AC66-E249-9CE8-8353EEB16B82}" type="datetimeFigureOut">
               <a:rPr lang="en-US" smtClean="0"/>
-              <a:t>9/6/22</a:t>
+              <a:t>9/2/25</a:t>
             </a:fld>
             <a:endParaRPr lang="en-US"/>
           </a:p>
@@ -3105,7 +3106,7 @@
           <a:p>
             <a:fld id="{BA763BF8-AC66-E249-9CE8-8353EEB16B82}" type="datetimeFigureOut">
               <a:rPr lang="en-US" smtClean="0"/>
-              <a:t>9/6/22</a:t>
+              <a:t>9/2/25</a:t>
             </a:fld>
             <a:endParaRPr lang="en-US"/>
           </a:p>
@@ -3393,7 +3394,7 @@
           <a:p>
             <a:fld id="{BA763BF8-AC66-E249-9CE8-8353EEB16B82}" type="datetimeFigureOut">
               <a:rPr lang="en-US" smtClean="0"/>
-              <a:t>9/6/22</a:t>
+              <a:t>9/2/25</a:t>
             </a:fld>
             <a:endParaRPr lang="en-US"/>
           </a:p>
@@ -3637,7 +3638,7 @@
             <a:fld id="{BA763BF8-AC66-E249-9CE8-8353EEB16B82}" type="datetimeFigureOut">
               <a:rPr lang="en-US" smtClean="0"/>
               <a:pPr/>
-              <a:t>9/6/22</a:t>
+              <a:t>9/2/25</a:t>
             </a:fld>
             <a:endParaRPr lang="en-US"/>
           </a:p>
@@ -4105,24 +4106,14 @@
           <a:p>
             <a:r>
               <a:rPr lang="en-GB" dirty="0"/>
-              <a:t>Vanessa </a:t>
-            </a:r>
-            <a:r>
-              <a:rPr lang="en-GB" dirty="0" err="1"/>
-              <a:t>LoBue</a:t>
-            </a:r>
-            <a:endParaRPr lang="en-GB" dirty="0"/>
+              <a:t>Jamil Bhanji</a:t>
+            </a:r>
           </a:p>
           <a:p>
             <a:r>
               <a:rPr lang="en-GB" dirty="0"/>
-              <a:t>Jamil </a:t>
-            </a:r>
-            <a:r>
-              <a:rPr lang="en-GB" dirty="0" err="1"/>
-              <a:t>Bhanji</a:t>
-            </a:r>
-            <a:endParaRPr lang="en-GB" dirty="0"/>
+              <a:t>Developed with Vanessa Lobue</a:t>
+            </a:r>
           </a:p>
           <a:p>
             <a:r>
@@ -4213,7 +4204,7 @@
           <a:p>
             <a:r>
               <a:rPr lang="en-US" dirty="0"/>
-              <a:t>Come to class!</a:t>
+              <a:t>Come to class! Submit your notes on the activities!</a:t>
             </a:r>
           </a:p>
           <a:p>
@@ -4314,7 +4305,7 @@
           <a:p>
             <a:r>
               <a:rPr lang="en-US" dirty="0"/>
-              <a:t>You must contribute one dataset for our data days</a:t>
+              <a:t>You must have access to a dataset to use for the Final Paper, and you can volunteer to use your data for Data Days</a:t>
             </a:r>
           </a:p>
           <a:p>
@@ -4323,7 +4314,7 @@
           <a:p>
             <a:r>
               <a:rPr lang="en-US" dirty="0"/>
-              <a:t>If you don’t have access to one, see us and we’ll help you!</a:t>
+              <a:t>If you don’t have access to one, I will help you!</a:t>
             </a:r>
           </a:p>
           <a:p>
@@ -4332,7 +4323,7 @@
           <a:p>
             <a:r>
               <a:rPr lang="en-US" dirty="0"/>
-              <a:t>Due: October 13 (but talk to us asap if you’re not sure what to use)</a:t>
+              <a:t>Data Dictionary Due: Week 6 (but talk to me asap if you’re not sure what to use)</a:t>
             </a:r>
           </a:p>
           <a:p>
@@ -4451,7 +4442,7 @@
           <a:p>
             <a:r>
               <a:rPr lang="en-US" dirty="0"/>
-              <a:t>Due: November 3</a:t>
+              <a:t>Due: October 28</a:t>
             </a:r>
           </a:p>
         </p:txBody>
@@ -4555,7 +4546,7 @@
           <a:p>
             <a:r>
               <a:rPr lang="en-US" dirty="0"/>
-              <a:t>Due: December 8 (last day of class)</a:t>
+              <a:t>Due: December 9 (last day of class)</a:t>
             </a:r>
           </a:p>
         </p:txBody>
@@ -6361,6 +6352,139 @@
           <p:cNvPr id="2" name="Title 1">
             <a:extLst>
               <a:ext uri="{FF2B5EF4-FFF2-40B4-BE49-F238E27FC236}">
+                <a16:creationId xmlns:a16="http://schemas.microsoft.com/office/drawing/2014/main" id="{37103DF7-291B-1A2C-2022-94D882E4D71E}"/>
+              </a:ext>
+            </a:extLst>
+          </p:cNvPr>
+          <p:cNvSpPr>
+            <a:spLocks noGrp="1"/>
+          </p:cNvSpPr>
+          <p:nvPr>
+            <p:ph type="title"/>
+          </p:nvPr>
+        </p:nvSpPr>
+        <p:spPr/>
+        <p:txBody>
+          <a:bodyPr/>
+          <a:lstStyle/>
+          <a:p>
+            <a:r>
+              <a:rPr lang="en-US" dirty="0"/>
+              <a:t>Artificial Intelligence</a:t>
+            </a:r>
+          </a:p>
+        </p:txBody>
+      </p:sp>
+      <p:sp>
+        <p:nvSpPr>
+          <p:cNvPr id="3" name="Content Placeholder 2">
+            <a:extLst>
+              <a:ext uri="{FF2B5EF4-FFF2-40B4-BE49-F238E27FC236}">
+                <a16:creationId xmlns:a16="http://schemas.microsoft.com/office/drawing/2014/main" id="{CE1831D3-B807-3F3D-728D-886E7F422C9D}"/>
+              </a:ext>
+            </a:extLst>
+          </p:cNvPr>
+          <p:cNvSpPr>
+            <a:spLocks noGrp="1"/>
+          </p:cNvSpPr>
+          <p:nvPr>
+            <p:ph idx="1"/>
+          </p:nvPr>
+        </p:nvSpPr>
+        <p:spPr/>
+        <p:txBody>
+          <a:bodyPr/>
+          <a:lstStyle/>
+          <a:p>
+            <a:r>
+              <a:rPr lang="en-US" dirty="0"/>
+              <a:t>Full policy in syllabus</a:t>
+            </a:r>
+          </a:p>
+          <a:p>
+            <a:r>
+              <a:rPr lang="en-US" dirty="0"/>
+              <a:t>Based on </a:t>
+            </a:r>
+            <a:r>
+              <a:rPr lang="en-US" dirty="0">
+                <a:hlinkClick r:id="rId2"/>
+              </a:rPr>
+              <a:t>APA policy </a:t>
+            </a:r>
+            <a:endParaRPr lang="en-US" dirty="0"/>
+          </a:p>
+          <a:p>
+            <a:pPr lvl="1"/>
+            <a:r>
+              <a:rPr lang="en-US" dirty="0"/>
+              <a:t>Be transparent</a:t>
+            </a:r>
+          </a:p>
+          <a:p>
+            <a:pPr lvl="1"/>
+            <a:r>
+              <a:rPr lang="en-US" dirty="0"/>
+              <a:t>Maintain ethical approaches</a:t>
+            </a:r>
+          </a:p>
+          <a:p>
+            <a:pPr lvl="1"/>
+            <a:r>
+              <a:rPr lang="en-US" dirty="0"/>
+              <a:t>Take responsibility</a:t>
+            </a:r>
+          </a:p>
+          <a:p>
+            <a:pPr lvl="1"/>
+            <a:r>
+              <a:rPr lang="en-US" dirty="0"/>
+              <a:t>Provide attribution</a:t>
+            </a:r>
+          </a:p>
+          <a:p>
+            <a:r>
+              <a:rPr lang="en-US" dirty="0"/>
+              <a:t>Do not use AI to write text for your final paper</a:t>
+            </a:r>
+          </a:p>
+        </p:txBody>
+      </p:sp>
+    </p:spTree>
+    <p:extLst>
+      <p:ext uri="{BB962C8B-B14F-4D97-AF65-F5344CB8AC3E}">
+        <p14:creationId xmlns:p14="http://schemas.microsoft.com/office/powerpoint/2010/main" val="2717325873"/>
+      </p:ext>
+    </p:extLst>
+  </p:cSld>
+  <p:clrMapOvr>
+    <a:masterClrMapping/>
+  </p:clrMapOvr>
+</p:sld>
+</file>
+
+<file path=ppt/slides/slide19.xml><?xml version="1.0" encoding="utf-8"?>
+<p:sld xmlns:a="http://schemas.openxmlformats.org/drawingml/2006/main" xmlns:r="http://schemas.openxmlformats.org/officeDocument/2006/relationships" xmlns:p="http://schemas.openxmlformats.org/presentationml/2006/main">
+  <p:cSld>
+    <p:spTree>
+      <p:nvGrpSpPr>
+        <p:cNvPr id="1" name=""/>
+        <p:cNvGrpSpPr/>
+        <p:nvPr/>
+      </p:nvGrpSpPr>
+      <p:grpSpPr>
+        <a:xfrm>
+          <a:off x="0" y="0"/>
+          <a:ext cx="0" cy="0"/>
+          <a:chOff x="0" y="0"/>
+          <a:chExt cx="0" cy="0"/>
+        </a:xfrm>
+      </p:grpSpPr>
+      <p:sp>
+        <p:nvSpPr>
+          <p:cNvPr id="2" name="Title 1">
+            <a:extLst>
+              <a:ext uri="{FF2B5EF4-FFF2-40B4-BE49-F238E27FC236}">
                 <a16:creationId xmlns:a16="http://schemas.microsoft.com/office/drawing/2014/main" id="{639949BD-5800-66C5-9D3D-9D25ABD5AFA2}"/>
               </a:ext>
             </a:extLst>
@@ -6437,7 +6561,7 @@
           <a:p>
             <a:r>
               <a:rPr lang="en-US" dirty="0"/>
-              <a:t>Statistical Methods, Fall 2022</a:t>
+              <a:t>Statistical Methods, Spring 2024</a:t>
             </a:r>
           </a:p>
         </p:txBody>
@@ -6474,7 +6598,7 @@
           <a:p>
             <a:r>
               <a:rPr lang="en-US" dirty="0"/>
-              <a:t>Thursdays, 10am – 1pm</a:t>
+              <a:t>Tuesdays, 10am – 12:50pm</a:t>
             </a:r>
           </a:p>
           <a:p>
@@ -6569,11 +6693,11 @@
           <a:p>
             <a:r>
               <a:rPr lang="en-US" dirty="0"/>
-              <a:t>Vanessa </a:t>
+              <a:t>Jamil </a:t>
             </a:r>
             <a:r>
               <a:rPr lang="en-US" dirty="0" err="1"/>
-              <a:t>LoBue</a:t>
+              <a:t>Bhanji</a:t>
             </a:r>
             <a:endParaRPr lang="en-US" dirty="0"/>
           </a:p>
@@ -6583,7 +6707,19 @@
           <a:p>
             <a:r>
               <a:rPr lang="en-US" dirty="0"/>
-              <a:t>Office Hours: Thurs 1-2</a:t>
+              <a:t>Office Hours: </a:t>
+            </a:r>
+            <a:r>
+              <a:rPr lang="en-US" b="1" dirty="0">
+                <a:solidFill>
+                  <a:srgbClr val="FF0000"/>
+                </a:solidFill>
+              </a:rPr>
+              <a:t>Thurs</a:t>
+            </a:r>
+            <a:r>
+              <a:rPr lang="en-US" dirty="0"/>
+              <a:t> 2:30-3:30pm</a:t>
             </a:r>
           </a:p>
           <a:p>
@@ -6592,7 +6728,7 @@
           <a:p>
             <a:r>
               <a:rPr lang="en-US" dirty="0"/>
-              <a:t>Office: Smith 341</a:t>
+              <a:t>Office: Smith 359</a:t>
             </a:r>
           </a:p>
           <a:p>
@@ -6608,7 +6744,7 @@
           <p:cNvPr id="4" name="Picture 3">
             <a:extLst>
               <a:ext uri="{FF2B5EF4-FFF2-40B4-BE49-F238E27FC236}">
-                <a16:creationId xmlns:a16="http://schemas.microsoft.com/office/drawing/2014/main" id="{97711C72-D69D-F34C-9761-301D4A495AB2}"/>
+                <a16:creationId xmlns:a16="http://schemas.microsoft.com/office/drawing/2014/main" id="{0D438CB2-7B89-F24C-96A8-4AD9D3080ED8}"/>
               </a:ext>
             </a:extLst>
           </p:cNvPr>
@@ -6625,8 +6761,8 @@
         </p:blipFill>
         <p:spPr>
           <a:xfrm>
-            <a:off x="6242928" y="1690688"/>
-            <a:ext cx="3660727" cy="3660727"/>
+            <a:off x="6852529" y="1825625"/>
+            <a:ext cx="3678312" cy="3678312"/>
           </a:xfrm>
           <a:prstGeom prst="rect">
             <a:avLst/>
@@ -6641,7 +6777,7 @@
     </p:spTree>
     <p:extLst>
       <p:ext uri="{BB962C8B-B14F-4D97-AF65-F5344CB8AC3E}">
-        <p14:creationId xmlns:p14="http://schemas.microsoft.com/office/powerpoint/2010/main" val="2406107587"/>
+        <p14:creationId xmlns:p14="http://schemas.microsoft.com/office/powerpoint/2010/main" val="1623361501"/>
       </p:ext>
     </p:extLst>
   </p:cSld>
@@ -6673,7 +6809,7 @@
           <p:cNvPr id="2" name="Title 1">
             <a:extLst>
               <a:ext uri="{FF2B5EF4-FFF2-40B4-BE49-F238E27FC236}">
-                <a16:creationId xmlns:a16="http://schemas.microsoft.com/office/drawing/2014/main" id="{3FF45570-B6D1-F94E-8E70-B29498408054}"/>
+                <a16:creationId xmlns:a16="http://schemas.microsoft.com/office/drawing/2014/main" id="{3975B2D4-FCB6-1210-D221-3AC24904D2B4}"/>
               </a:ext>
             </a:extLst>
           </p:cNvPr>
@@ -6691,7 +6827,7 @@
           <a:p>
             <a:r>
               <a:rPr lang="en-US" dirty="0"/>
-              <a:t>Instructors</a:t>
+              <a:t>Today’s agenda</a:t>
             </a:r>
           </a:p>
         </p:txBody>
@@ -6701,7 +6837,7 @@
           <p:cNvPr id="3" name="Content Placeholder 2">
             <a:extLst>
               <a:ext uri="{FF2B5EF4-FFF2-40B4-BE49-F238E27FC236}">
-                <a16:creationId xmlns:a16="http://schemas.microsoft.com/office/drawing/2014/main" id="{D30C09F8-BB15-0C4F-859C-67378AF323A6}"/>
+                <a16:creationId xmlns:a16="http://schemas.microsoft.com/office/drawing/2014/main" id="{0F490EDC-75C0-E0E7-DD5E-B0D7A89E9CF1}"/>
               </a:ext>
             </a:extLst>
           </p:cNvPr>
@@ -6719,91 +6855,33 @@
           <a:p>
             <a:r>
               <a:rPr lang="en-US" dirty="0"/>
-              <a:t>Jamil </a:t>
-            </a:r>
-            <a:r>
-              <a:rPr lang="en-US" dirty="0" err="1"/>
-              <a:t>Bhanji</a:t>
-            </a:r>
-            <a:endParaRPr lang="en-US" dirty="0"/>
-          </a:p>
-          <a:p>
-            <a:endParaRPr lang="en-US" dirty="0"/>
-          </a:p>
-          <a:p>
-            <a:r>
-              <a:rPr lang="en-US" dirty="0"/>
-              <a:t>Office Hours: </a:t>
-            </a:r>
-            <a:r>
-              <a:rPr lang="en-US" b="1" dirty="0">
-                <a:solidFill>
-                  <a:srgbClr val="FF0000"/>
-                </a:solidFill>
-              </a:rPr>
-              <a:t>Thurs</a:t>
-            </a:r>
-            <a:r>
-              <a:rPr lang="en-US" dirty="0"/>
-              <a:t> 2-3</a:t>
-            </a:r>
-          </a:p>
-          <a:p>
-            <a:endParaRPr lang="en-US" dirty="0"/>
-          </a:p>
-          <a:p>
-            <a:r>
-              <a:rPr lang="en-US" dirty="0"/>
-              <a:t>Office: Smith 4-114</a:t>
-            </a:r>
-          </a:p>
-          <a:p>
-            <a:endParaRPr lang="en-US" dirty="0"/>
-          </a:p>
-          <a:p>
-            <a:endParaRPr lang="en-US" dirty="0"/>
-          </a:p>
-        </p:txBody>
-      </p:sp>
-      <p:pic>
-        <p:nvPicPr>
-          <p:cNvPr id="4" name="Picture 3">
-            <a:extLst>
-              <a:ext uri="{FF2B5EF4-FFF2-40B4-BE49-F238E27FC236}">
-                <a16:creationId xmlns:a16="http://schemas.microsoft.com/office/drawing/2014/main" id="{0D438CB2-7B89-F24C-96A8-4AD9D3080ED8}"/>
-              </a:ext>
-            </a:extLst>
-          </p:cNvPr>
-          <p:cNvPicPr>
-            <a:picLocks noChangeAspect="1"/>
-          </p:cNvPicPr>
-          <p:nvPr/>
-        </p:nvPicPr>
-        <p:blipFill>
-          <a:blip r:embed="rId2"/>
-          <a:stretch>
-            <a:fillRect/>
-          </a:stretch>
-        </p:blipFill>
-        <p:spPr>
-          <a:xfrm>
-            <a:off x="6261686" y="1673104"/>
-            <a:ext cx="3678312" cy="3678312"/>
-          </a:xfrm>
-          <a:prstGeom prst="rect">
-            <a:avLst/>
-          </a:prstGeom>
-          <a:ln>
-            <a:solidFill>
-              <a:schemeClr val="tx1"/>
-            </a:solidFill>
-          </a:ln>
-        </p:spPr>
-      </p:pic>
+              <a:t>Introductions</a:t>
+            </a:r>
+          </a:p>
+          <a:p>
+            <a:r>
+              <a:rPr lang="en-US" dirty="0"/>
+              <a:t>Class format</a:t>
+            </a:r>
+          </a:p>
+          <a:p>
+            <a:r>
+              <a:rPr lang="en-US" dirty="0"/>
+              <a:t>Survey</a:t>
+            </a:r>
+          </a:p>
+          <a:p>
+            <a:r>
+              <a:rPr lang="en-US" dirty="0"/>
+              <a:t>Software setup</a:t>
+            </a:r>
+          </a:p>
+        </p:txBody>
+      </p:sp>
     </p:spTree>
     <p:extLst>
       <p:ext uri="{BB962C8B-B14F-4D97-AF65-F5344CB8AC3E}">
-        <p14:creationId xmlns:p14="http://schemas.microsoft.com/office/powerpoint/2010/main" val="1623361501"/>
+        <p14:creationId xmlns:p14="http://schemas.microsoft.com/office/powerpoint/2010/main" val="2220569236"/>
       </p:ext>
     </p:extLst>
   </p:cSld>
@@ -6853,7 +6931,7 @@
           <a:p>
             <a:r>
               <a:rPr lang="en-US" dirty="0"/>
-              <a:t>Class Format</a:t>
+              <a:t>Usual Class Format</a:t>
             </a:r>
           </a:p>
         </p:txBody>
@@ -6877,7 +6955,7 @@
         <p:spPr/>
         <p:txBody>
           <a:bodyPr>
-            <a:normAutofit lnSpcReduction="10000"/>
+            <a:normAutofit fontScale="92500"/>
           </a:bodyPr>
           <a:lstStyle/>
           <a:p>
@@ -6901,7 +6979,7 @@
           <a:p>
             <a:r>
               <a:rPr lang="en-US" dirty="0"/>
-              <a:t>Independent work on lab, in both SPSS and R (1-2 hours)</a:t>
+              <a:t>Independent/group work on lab, in both SPSS and R (1-2 hours)</a:t>
             </a:r>
           </a:p>
           <a:p>
@@ -6910,7 +6988,7 @@
           <a:p>
             <a:r>
               <a:rPr lang="en-US" dirty="0"/>
-              <a:t>Discussion of lab (5-10 min)</a:t>
+              <a:t>Discussion of lab (15-20 min)</a:t>
             </a:r>
           </a:p>
           <a:p>
@@ -7433,7 +7511,7 @@
           <a:p>
             <a:r>
               <a:rPr lang="en-US" dirty="0"/>
-              <a:t>Bring laptop to class (if you don’t have one, talk to us!) - connect to </a:t>
+              <a:t>Bring laptop to class (if you don’t have one, talk to me!) - connect to </a:t>
             </a:r>
             <a:r>
               <a:rPr lang="en-US" dirty="0" err="1"/>
@@ -7441,13 +7519,8 @@
             </a:r>
             <a:r>
               <a:rPr lang="en-US" dirty="0"/>
-              <a:t> or other </a:t>
-            </a:r>
-            <a:r>
-              <a:rPr lang="en-US" dirty="0" err="1"/>
-              <a:t>wifi</a:t>
-            </a:r>
-            <a:endParaRPr lang="en-US" dirty="0"/>
+              <a:t> or whatever you have access to.</a:t>
+            </a:r>
           </a:p>
           <a:p>
             <a:endParaRPr lang="en-US" dirty="0"/>
